--- a/decks/hist-medicine/hist-medicine_ch5_care.pptx
+++ b/decks/hist-medicine/hist-medicine_ch5_care.pptx
@@ -126,30 +126,30 @@
   <p:extLst>
     <p:ext uri="{521415D9-36F7-43E2-AB2F-B90AF26B5E84}">
       <p14:sectionLst xmlns:p14="http://schemas.microsoft.com/office/powerpoint/2010/main">
-        <p14:section name="Opening" id="{dfed5189-ffb9-88e6-dbea-a5bbbbbda5a0}">
+        <p14:section name="Opening" id="{833af28a-b43a-9f12-e29a-9d2f859a0e38}">
           <p14:sldIdLst>
             <p14:sldId id="256"/>
           </p14:sldIdLst>
         </p14:section>
-        <p14:section name="Gate" id="{928c8b60-38ba-9918-9eef-35b485cfe9e3}">
+        <p14:section name="Gate" id="{e7e95110-57ed-6a05-2898-3b0be582b918}">
           <p14:sldIdLst>
             <p14:sldId id="257"/>
             <p14:sldId id="258"/>
           </p14:sldIdLst>
         </p14:section>
-        <p14:section name="Pre-teach" id="{2cb3374a-0709-128d-9160-114edf28e243}">
+        <p14:section name="Pre-teach" id="{b12753ef-78be-c768-aa85-796cee791a61}">
           <p14:sldIdLst>
             <p14:sldId id="259"/>
             <p14:sldId id="260"/>
           </p14:sldIdLst>
         </p14:section>
-        <p14:section name="Read-along" id="{6656f503-2670-b9fc-f6a2-1ef141629447}">
+        <p14:section name="Read-along" id="{b7679fea-c1f2-4cce-d624-0911f0b776f4}">
           <p14:sldIdLst>
             <p14:sldId id="261"/>
             <p14:sldId id="262"/>
           </p14:sldIdLst>
         </p14:section>
-        <p14:section name="Teach" id="{9fb6bf03-d7c4-aef6-2b9b-491e870504f8}">
+        <p14:section name="Teach" id="{ee9af4cb-707e-1ed9-8b8d-4a09422f7f7e}">
           <p14:sldIdLst>
             <p14:sldId id="263"/>
             <p14:sldId id="264"/>
@@ -158,7 +158,7 @@
             <p14:sldId id="267"/>
           </p14:sldIdLst>
         </p14:section>
-        <p14:section name="Routes" id="{08efbfaf-94a8-c84e-36e0-99e89237fbe4}">
+        <p14:section name="Routes" id="{6bf674e2-a5dd-5b5c-1410-f45abb1dd274}">
           <p14:sldIdLst>
             <p14:sldId id="268"/>
             <p14:sldId id="269"/>
@@ -166,12 +166,12 @@
             <p14:sldId id="271"/>
           </p14:sldIdLst>
         </p14:section>
-        <p14:section name="Close" id="{c0900c7c-faca-8242-70f2-60da6bc5b0dc}">
+        <p14:section name="Close" id="{23f074e3-f05a-ce15-9345-15e472205ccf}">
           <p14:sldIdLst>
             <p14:sldId id="272"/>
           </p14:sldIdLst>
         </p14:section>
-        <p14:section name="Answers" id="{1c00bb4f-122f-55fd-6a8e-138988c17479}">
+        <p14:section name="Answers" id="{017dd069-c5dd-3943-b121-40a7eaf9aeee}">
           <p14:sldIdLst>
             <p14:sldId id="273"/>
             <p14:sldId id="274"/>
@@ -1327,7 +1327,7 @@
               <a:rPr lang="en-US" dirty="0"/>
               <a:t>Exit ticket — individual, silent, on a slip or mini-whiteboard. Recall before help: no notes, no lanes, no hints. Collect before pupils leave.
 Question: Which medic trained at university and was the most expensive?
-Answer: D   The physician. Physicians studied Galen at university, passed exams and charged fees only the wealthy could pay.
+Answer: A   The physician. Physicians studied Galen at university, passed exams and charged fees only the wealthy could pay.
 Source of this question: gate item 1 re-asked (options rotated) — this chapter has no third quick-check module.
 The ebook also holds task 3, "Your conclusion on hospitals", for homework or the next lesson's do now.
 Sort the slips: correct → ready to move on; incorrect → start next lesson in the pre-teach group, with the read-along and the Support lane. Same destination next time.</a:t>
@@ -1601,9 +1601,9 @@
             <a:r>
               <a:rPr lang="en-US" dirty="0"/>
               <a:t>Do now — retrieval. Silent, no notes, no help: recall comes before any support. Give about four minutes.
-1. Which medic trained at university and was the most expensive?  →  A   The physician
+1. Which medic trained at university and was the most expensive?  →  B   The physician
 2. Most sick people in medieval England were treated at home by ___ in the family.  →  women
-3. What did medieval hospitals mainly provide?  →  A   Care: rest, clean surroundings, fresh food and prayer
+3. What did medieval hospitals mainly provide?  →  B   Care: rest, clean surroundings, fresh food and prayer
 Circulate: who gets 3/3 (Stretch route), 2/3 (Core), 0–1 (Support)? Use this to route pupils later in the lesson.</a:t>
             </a:r>
             <a:endParaRPr lang="en-US" dirty="0"/>
@@ -1693,7 +1693,7 @@
             <a:r>
               <a:rPr lang="en-US" dirty="0"/>
               <a:t>Answers — exit ticket: Exit ticket. Reveal the answer; pupils mark their own work in a different colour, then read the "why" together. Same destination for every lane, so one answer serves the whole class.
-Answer: D   The physician
+Answer: A   The physician
 Why: Physicians studied Galen at university, passed exams and charged fees only the wealthy could pay.
 Ask a Support pupil to explain one step, and a Stretch pupil to share their extension.</a:t>
             </a:r>
@@ -1784,9 +1784,9 @@
             <a:r>
               <a:rPr lang="en-US" dirty="0"/>
               <a:t>Answers — pupils mark their own in a different colour, then hands up for 3/3, 2/3, 1/3.
-1. A   The physician. Physicians studied Galen at university, passed exams and charged fees only the wealthy could pay.
+1. B   The physician. Physicians studied Galen at university, passed exams and charged fees only the wealthy could pay.
 2. women. A mother, wife or daughter nursed the sick at home; physicians were far too expensive for most families.
-3. A   Care: rest, clean surroundings, fresh food and prayer. Hospitals focused on care over cure. They gave rest, cleanliness, food and prayer, and usually turned away the infectious.
+3. B   Care: rest, clean surroundings, fresh food and prayer. Hospitals focused on care over cure. They gave rest, cleanliness, food and prayer, and usually turned away the infectious.
 Say the route each score points to: 3/3 Stretch, 2/3 Core, 0–1 Support. Pupils may choose to move up.</a:t>
             </a:r>
             <a:endParaRPr lang="en-US" dirty="0"/>
@@ -9788,7 +9788,7 @@
                 <a:ea typeface="Calibri" pitchFamily="34" charset="-122"/>
                 <a:cs typeface="Calibri" pitchFamily="34" charset="-120"/>
               </a:rPr>
-              <a:t>The apothecary</a:t>
+              <a:t>The physician</a:t>
             </a:r>
             <a:endParaRPr lang="en-US" sz="2400" dirty="0"/>
           </a:p>
@@ -9899,7 +9899,7 @@
                 <a:ea typeface="Calibri" pitchFamily="34" charset="-122"/>
                 <a:cs typeface="Calibri" pitchFamily="34" charset="-120"/>
               </a:rPr>
-              <a:t>The physician</a:t>
+              <a:t>The apothecary</a:t>
             </a:r>
             <a:endParaRPr lang="en-US" sz="2400" dirty="0"/>
           </a:p>
@@ -11519,7 +11519,7 @@
                 <a:ea typeface="Calibri" pitchFamily="34" charset="-122"/>
                 <a:cs typeface="Calibri" pitchFamily="34" charset="-120"/>
               </a:rPr>
-              <a:t>The physician</a:t>
+              <a:t>The apothecary</a:t>
             </a:r>
             <a:endParaRPr lang="en-US" sz="2400" dirty="0"/>
           </a:p>
@@ -11556,7 +11556,7 @@
                 <a:ea typeface="Calibri" pitchFamily="34" charset="-122"/>
                 <a:cs typeface="Calibri" pitchFamily="34" charset="-120"/>
               </a:rPr>
-              <a:t>The apothecary</a:t>
+              <a:t>The physician</a:t>
             </a:r>
             <a:endParaRPr lang="en-US" sz="2400" dirty="0"/>
           </a:p>
@@ -12032,7 +12032,7 @@
                 <a:ea typeface="Calibri" pitchFamily="34" charset="-122"/>
                 <a:cs typeface="Calibri" pitchFamily="34" charset="-120"/>
               </a:rPr>
-              <a:t>Care: rest, clean surroundings, fresh food and prayer</a:t>
+              <a:t>Free medicines from an apothecary</a:t>
             </a:r>
             <a:endParaRPr lang="en-US" sz="1800" dirty="0"/>
           </a:p>
@@ -12069,7 +12069,7 @@
                 <a:ea typeface="Calibri" pitchFamily="34" charset="-122"/>
                 <a:cs typeface="Calibri" pitchFamily="34" charset="-120"/>
               </a:rPr>
-              <a:t>Surgery by trained physicians</a:t>
+              <a:t>Care: rest, clean surroundings, fresh food and prayer</a:t>
             </a:r>
             <a:endParaRPr lang="en-US" sz="1800" dirty="0"/>
           </a:p>
@@ -12106,7 +12106,7 @@
                 <a:ea typeface="Calibri" pitchFamily="34" charset="-122"/>
                 <a:cs typeface="Calibri" pitchFamily="34" charset="-120"/>
               </a:rPr>
-              <a:t>Cures for infectious diseases such as plague</a:t>
+              <a:t>Surgery by trained physicians</a:t>
             </a:r>
             <a:endParaRPr lang="en-US" sz="1800" dirty="0"/>
           </a:p>
@@ -12143,7 +12143,7 @@
                 <a:ea typeface="Calibri" pitchFamily="34" charset="-122"/>
                 <a:cs typeface="Calibri" pitchFamily="34" charset="-120"/>
               </a:rPr>
-              <a:t>Free medicines from an apothecary</a:t>
+              <a:t>Cures for infectious diseases such as plague</a:t>
             </a:r>
             <a:endParaRPr lang="en-US" sz="1800" dirty="0"/>
           </a:p>
@@ -12482,7 +12482,7 @@
                 <a:ea typeface="Cambria" pitchFamily="34" charset="-122"/>
                 <a:cs typeface="Cambria" pitchFamily="34" charset="-120"/>
               </a:rPr>
-              <a:t>D   The physician</a:t>
+              <a:t>A   The physician</a:t>
             </a:r>
             <a:endParaRPr lang="en-US" sz="1800" dirty="0"/>
           </a:p>
@@ -13003,7 +13003,7 @@
                 <a:ea typeface="Calibri" pitchFamily="34" charset="-122"/>
                 <a:cs typeface="Calibri" pitchFamily="34" charset="-120"/>
               </a:rPr>
-              <a:t>A   The physician</a:t>
+              <a:t>B   The physician</a:t>
             </a:r>
             <a:endParaRPr lang="en-US" sz="2200" dirty="0"/>
           </a:p>
@@ -13503,7 +13503,7 @@
                 <a:ea typeface="Calibri" pitchFamily="34" charset="-122"/>
                 <a:cs typeface="Calibri" pitchFamily="34" charset="-120"/>
               </a:rPr>
-              <a:t>A   Care: rest, clean surroundings, fresh food and prayer</a:t>
+              <a:t>B   Care: rest, clean surroundings, fresh food and prayer</a:t>
             </a:r>
             <a:endParaRPr lang="en-US" sz="2200" dirty="0"/>
           </a:p>

--- a/decks/hist-medicine/hist-medicine_ch5_care.pptx
+++ b/decks/hist-medicine/hist-medicine_ch5_care.pptx
@@ -126,30 +126,30 @@
   <p:extLst>
     <p:ext uri="{521415D9-36F7-43E2-AB2F-B90AF26B5E84}">
       <p14:sectionLst xmlns:p14="http://schemas.microsoft.com/office/powerpoint/2010/main">
-        <p14:section name="Opening" id="{833af28a-b43a-9f12-e29a-9d2f859a0e38}">
+        <p14:section name="Opening" id="{e5d91dce-f7fe-ca5e-4b5c-3de5d6e4972e}">
           <p14:sldIdLst>
             <p14:sldId id="256"/>
           </p14:sldIdLst>
         </p14:section>
-        <p14:section name="Gate" id="{e7e95110-57ed-6a05-2898-3b0be582b918}">
+        <p14:section name="Gate" id="{5b0656cb-f256-a327-cec9-bd0ef8a37c88}">
           <p14:sldIdLst>
             <p14:sldId id="257"/>
             <p14:sldId id="258"/>
           </p14:sldIdLst>
         </p14:section>
-        <p14:section name="Pre-teach" id="{b12753ef-78be-c768-aa85-796cee791a61}">
+        <p14:section name="Pre-teach" id="{f74fc541-f695-11c1-56f1-d83dfd20beba}">
           <p14:sldIdLst>
             <p14:sldId id="259"/>
             <p14:sldId id="260"/>
           </p14:sldIdLst>
         </p14:section>
-        <p14:section name="Read-along" id="{b7679fea-c1f2-4cce-d624-0911f0b776f4}">
+        <p14:section name="Read-along" id="{878e7070-9665-bbaf-71a6-41b3639bff41}">
           <p14:sldIdLst>
             <p14:sldId id="261"/>
             <p14:sldId id="262"/>
           </p14:sldIdLst>
         </p14:section>
-        <p14:section name="Teach" id="{ee9af4cb-707e-1ed9-8b8d-4a09422f7f7e}">
+        <p14:section name="Teach" id="{4df479dd-f10d-8372-ce32-8598446bfd73}">
           <p14:sldIdLst>
             <p14:sldId id="263"/>
             <p14:sldId id="264"/>
@@ -158,7 +158,7 @@
             <p14:sldId id="267"/>
           </p14:sldIdLst>
         </p14:section>
-        <p14:section name="Routes" id="{6bf674e2-a5dd-5b5c-1410-f45abb1dd274}">
+        <p14:section name="Routes" id="{2c39b2d7-d33c-edae-cdfd-58b5be339282}">
           <p14:sldIdLst>
             <p14:sldId id="268"/>
             <p14:sldId id="269"/>
@@ -166,12 +166,12 @@
             <p14:sldId id="271"/>
           </p14:sldIdLst>
         </p14:section>
-        <p14:section name="Close" id="{23f074e3-f05a-ce15-9345-15e472205ccf}">
+        <p14:section name="Close" id="{a5c56695-5be1-23dc-443a-0bf3f54e1846}">
           <p14:sldIdLst>
             <p14:sldId id="272"/>
           </p14:sldIdLst>
         </p14:section>
-        <p14:section name="Answers" id="{017dd069-c5dd-3943-b121-40a7eaf9aeee}">
+        <p14:section name="Answers" id="{6f845c60-2bb4-209a-98d9-b8ea069afcb4}">
           <p14:sldIdLst>
             <p14:sldId id="273"/>
             <p14:sldId id="274"/>
